--- a/Report Files/Poster.pptx
+++ b/Report Files/Poster.pptx
@@ -8,7 +8,7 @@
     <p:notesMasterId r:id="rId3"/>
   </p:notesMasterIdLst>
   <p:sldIdLst>
-    <p:sldId id="264" r:id="rId2"/>
+    <p:sldId id="256" r:id="rId2"/>
   </p:sldIdLst>
   <p:sldSz cx="30275213" cy="21383625"/>
   <p:notesSz cx="6858000" cy="9144000"/>
@@ -108,18 +108,6 @@
     </a:lvl9pPr>
   </p:defaultTextStyle>
   <p:extLst>
-    <p:ext uri="{521415D9-36F7-43E2-AB2F-B90AF26B5E84}">
-      <p14:sectionLst xmlns:p14="http://schemas.microsoft.com/office/powerpoint/2010/main">
-        <p14:section name="Untitled Section" id="{09150923-9328-4E74-B4A5-ABB06B31244F}">
-          <p14:sldIdLst/>
-        </p14:section>
-        <p14:section name="Untitled Section" id="{D019FF50-7A41-4527-8BB5-016C3F0C7EE6}">
-          <p14:sldIdLst>
-            <p14:sldId id="264"/>
-          </p14:sldIdLst>
-        </p14:section>
-      </p14:sectionLst>
-    </p:ext>
     <p:ext uri="{EFAFB233-063F-42B5-8137-9DF3F51BA10A}">
       <p15:sldGuideLst xmlns:p15="http://schemas.microsoft.com/office/powerpoint/2012/main">
         <p15:guide id="1" orient="horz" pos="6735" userDrawn="1">
@@ -485,95 +473,6 @@
     </a:lvl9pPr>
   </p:notesStyle>
 </p:notesMaster>
-</file>
-
-<file path=ppt/notesSlides/notesSlide1.xml><?xml version="1.0" encoding="utf-8"?>
-<p:notes xmlns:a="http://schemas.openxmlformats.org/drawingml/2006/main" xmlns:r="http://schemas.openxmlformats.org/officeDocument/2006/relationships" xmlns:p="http://schemas.openxmlformats.org/presentationml/2006/main">
-  <p:cSld>
-    <p:spTree>
-      <p:nvGrpSpPr>
-        <p:cNvPr id="1" name=""/>
-        <p:cNvGrpSpPr/>
-        <p:nvPr/>
-      </p:nvGrpSpPr>
-      <p:grpSpPr>
-        <a:xfrm>
-          <a:off x="0" y="0"/>
-          <a:ext cx="0" cy="0"/>
-          <a:chOff x="0" y="0"/>
-          <a:chExt cx="0" cy="0"/>
-        </a:xfrm>
-      </p:grpSpPr>
-      <p:sp>
-        <p:nvSpPr>
-          <p:cNvPr id="2" name="Slide Image Placeholder 1"/>
-          <p:cNvSpPr>
-            <a:spLocks noGrp="1" noRot="1" noChangeAspect="1"/>
-          </p:cNvSpPr>
-          <p:nvPr>
-            <p:ph type="sldImg"/>
-          </p:nvPr>
-        </p:nvSpPr>
-        <p:spPr>
-          <a:xfrm>
-            <a:off x="1001713" y="685800"/>
-            <a:ext cx="4854575" cy="3429000"/>
-          </a:xfrm>
-        </p:spPr>
-      </p:sp>
-      <p:sp>
-        <p:nvSpPr>
-          <p:cNvPr id="3" name="Notes Placeholder 2"/>
-          <p:cNvSpPr>
-            <a:spLocks noGrp="1"/>
-          </p:cNvSpPr>
-          <p:nvPr>
-            <p:ph type="body" idx="1"/>
-          </p:nvPr>
-        </p:nvSpPr>
-        <p:spPr/>
-        <p:txBody>
-          <a:bodyPr/>
-          <a:lstStyle/>
-          <a:p>
-            <a:endParaRPr lang="en-IE" dirty="0"/>
-          </a:p>
-        </p:txBody>
-      </p:sp>
-      <p:sp>
-        <p:nvSpPr>
-          <p:cNvPr id="4" name="Slide Number Placeholder 3"/>
-          <p:cNvSpPr>
-            <a:spLocks noGrp="1"/>
-          </p:cNvSpPr>
-          <p:nvPr>
-            <p:ph type="sldNum" sz="quarter" idx="5"/>
-          </p:nvPr>
-        </p:nvSpPr>
-        <p:spPr/>
-        <p:txBody>
-          <a:bodyPr/>
-          <a:lstStyle/>
-          <a:p>
-            <a:fld id="{18A24599-C6A5-46E6-B8D9-1A0B63C08072}" type="slidenum">
-              <a:rPr lang="en-US" smtClean="0"/>
-              <a:t>1</a:t>
-            </a:fld>
-            <a:endParaRPr lang="en-US"/>
-          </a:p>
-        </p:txBody>
-      </p:sp>
-    </p:spTree>
-    <p:extLst>
-      <p:ext uri="{BB962C8B-B14F-4D97-AF65-F5344CB8AC3E}">
-        <p14:creationId xmlns:p14="http://schemas.microsoft.com/office/powerpoint/2010/main" val="1604621264"/>
-      </p:ext>
-    </p:extLst>
-  </p:cSld>
-  <p:clrMapOvr>
-    <a:masterClrMapping/>
-  </p:clrMapOvr>
-</p:notes>
 </file>
 
 <file path=ppt/slideLayouts/slideLayout1.xml><?xml version="1.0" encoding="utf-8"?>
@@ -3811,327 +3710,12 @@
           <a:chExt cx="0" cy="0"/>
         </a:xfrm>
       </p:grpSpPr>
-      <p:sp>
-        <p:nvSpPr>
-          <p:cNvPr id="4" name="Rectangle 3"/>
-          <p:cNvSpPr/>
-          <p:nvPr/>
-        </p:nvSpPr>
-        <p:spPr>
-          <a:xfrm flipH="1">
-            <a:off x="863579" y="0"/>
-            <a:ext cx="28511500" cy="2879950"/>
-          </a:xfrm>
-          <a:prstGeom prst="rect">
-            <a:avLst/>
-          </a:prstGeom>
-          <a:gradFill flip="none" rotWithShape="1">
-            <a:gsLst>
-              <a:gs pos="0">
-                <a:srgbClr val="EDF1F2">
-                  <a:shade val="30000"/>
-                  <a:satMod val="115000"/>
-                </a:srgbClr>
-              </a:gs>
-              <a:gs pos="50000">
-                <a:srgbClr val="EDF1F2">
-                  <a:shade val="67500"/>
-                  <a:satMod val="115000"/>
-                </a:srgbClr>
-              </a:gs>
-              <a:gs pos="100000">
-                <a:srgbClr val="EDF1F2">
-                  <a:shade val="100000"/>
-                  <a:satMod val="115000"/>
-                </a:srgbClr>
-              </a:gs>
-            </a:gsLst>
-            <a:path path="circle">
-              <a:fillToRect l="50000" t="50000" r="50000" b="50000"/>
-            </a:path>
-            <a:tileRect/>
-          </a:gradFill>
-          <a:ln>
-            <a:noFill/>
-          </a:ln>
-        </p:spPr>
-        <p:style>
-          <a:lnRef idx="2">
-            <a:schemeClr val="accent1">
-              <a:shade val="50000"/>
-            </a:schemeClr>
-          </a:lnRef>
-          <a:fillRef idx="1">
-            <a:schemeClr val="accent1"/>
-          </a:fillRef>
-          <a:effectRef idx="0">
-            <a:schemeClr val="accent1"/>
-          </a:effectRef>
-          <a:fontRef idx="minor">
-            <a:schemeClr val="lt1"/>
-          </a:fontRef>
-        </p:style>
-        <p:txBody>
-          <a:bodyPr rtlCol="0" anchor="ctr"/>
-          <a:lstStyle/>
-          <a:p>
-            <a:pPr algn="ctr"/>
-            <a:endParaRPr lang="en-US" sz="3757"/>
-          </a:p>
-        </p:txBody>
-      </p:sp>
-      <p:sp>
-        <p:nvSpPr>
-          <p:cNvPr id="5" name="Rectangle 3"/>
-          <p:cNvSpPr/>
-          <p:nvPr/>
-        </p:nvSpPr>
-        <p:spPr>
-          <a:xfrm flipH="1">
-            <a:off x="761344" y="0"/>
-            <a:ext cx="28511500" cy="2771951"/>
-          </a:xfrm>
-          <a:prstGeom prst="rect">
-            <a:avLst/>
-          </a:prstGeom>
-          <a:gradFill flip="none" rotWithShape="1">
-            <a:gsLst>
-              <a:gs pos="0">
-                <a:srgbClr val="09AF25">
-                  <a:shade val="30000"/>
-                  <a:satMod val="115000"/>
-                </a:srgbClr>
-              </a:gs>
-              <a:gs pos="50000">
-                <a:srgbClr val="09AF25">
-                  <a:shade val="67500"/>
-                  <a:satMod val="115000"/>
-                </a:srgbClr>
-              </a:gs>
-              <a:gs pos="100000">
-                <a:srgbClr val="09AF25">
-                  <a:shade val="100000"/>
-                  <a:satMod val="115000"/>
-                </a:srgbClr>
-              </a:gs>
-            </a:gsLst>
-            <a:path path="circle">
-              <a:fillToRect l="50000" t="50000" r="50000" b="50000"/>
-            </a:path>
-            <a:tileRect/>
-          </a:gradFill>
-          <a:ln>
-            <a:noFill/>
-          </a:ln>
-        </p:spPr>
-        <p:style>
-          <a:lnRef idx="2">
-            <a:schemeClr val="accent1">
-              <a:shade val="50000"/>
-            </a:schemeClr>
-          </a:lnRef>
-          <a:fillRef idx="1">
-            <a:schemeClr val="accent1"/>
-          </a:fillRef>
-          <a:effectRef idx="0">
-            <a:schemeClr val="accent1"/>
-          </a:effectRef>
-          <a:fontRef idx="minor">
-            <a:schemeClr val="lt1"/>
-          </a:fontRef>
-        </p:style>
-        <p:txBody>
-          <a:bodyPr rtlCol="0" anchor="ctr"/>
-          <a:lstStyle/>
-          <a:p>
-            <a:pPr algn="ctr"/>
-            <a:endParaRPr lang="en-US" sz="3757"/>
-          </a:p>
-        </p:txBody>
-      </p:sp>
-      <p:sp>
-        <p:nvSpPr>
-          <p:cNvPr id="6" name="Rectangle 3"/>
-          <p:cNvSpPr/>
-          <p:nvPr/>
-        </p:nvSpPr>
-        <p:spPr>
-          <a:xfrm flipH="1">
-            <a:off x="863579" y="1"/>
-            <a:ext cx="28511500" cy="2573954"/>
-          </a:xfrm>
-          <a:prstGeom prst="rect">
-            <a:avLst/>
-          </a:prstGeom>
-          <a:gradFill flip="none" rotWithShape="1">
-            <a:gsLst>
-              <a:gs pos="0">
-                <a:srgbClr val="09AF25">
-                  <a:tint val="66000"/>
-                  <a:satMod val="160000"/>
-                </a:srgbClr>
-              </a:gs>
-              <a:gs pos="50000">
-                <a:srgbClr val="09AF25">
-                  <a:tint val="44500"/>
-                  <a:satMod val="160000"/>
-                </a:srgbClr>
-              </a:gs>
-              <a:gs pos="100000">
-                <a:srgbClr val="09AF25">
-                  <a:tint val="23500"/>
-                  <a:satMod val="160000"/>
-                </a:srgbClr>
-              </a:gs>
-            </a:gsLst>
-            <a:path path="circle">
-              <a:fillToRect l="50000" t="50000" r="50000" b="50000"/>
-            </a:path>
-            <a:tileRect/>
-          </a:gradFill>
-          <a:ln>
-            <a:noFill/>
-          </a:ln>
-        </p:spPr>
-        <p:style>
-          <a:lnRef idx="2">
-            <a:schemeClr val="accent1">
-              <a:shade val="50000"/>
-            </a:schemeClr>
-          </a:lnRef>
-          <a:fillRef idx="1">
-            <a:schemeClr val="accent1"/>
-          </a:fillRef>
-          <a:effectRef idx="0">
-            <a:schemeClr val="accent1"/>
-          </a:effectRef>
-          <a:fontRef idx="minor">
-            <a:schemeClr val="lt1"/>
-          </a:fontRef>
-        </p:style>
-        <p:txBody>
-          <a:bodyPr rtlCol="0" anchor="ctr"/>
-          <a:lstStyle/>
-          <a:p>
-            <a:pPr algn="ctr"/>
-            <a:endParaRPr lang="en-US" sz="3757" dirty="0"/>
-          </a:p>
-        </p:txBody>
-      </p:sp>
-      <p:sp>
-        <p:nvSpPr>
-          <p:cNvPr id="16" name="TextBox 15"/>
-          <p:cNvSpPr txBox="1"/>
-          <p:nvPr/>
-        </p:nvSpPr>
-        <p:spPr>
-          <a:xfrm>
-            <a:off x="4683630" y="403940"/>
-            <a:ext cx="20775216" cy="1200329"/>
-          </a:xfrm>
-          <a:prstGeom prst="rect">
-            <a:avLst/>
-          </a:prstGeom>
-          <a:noFill/>
-        </p:spPr>
-        <p:txBody>
-          <a:bodyPr wrap="square" rtlCol="0">
-            <a:spAutoFit/>
-          </a:bodyPr>
-          <a:lstStyle/>
-          <a:p>
-            <a:pPr algn="ctr"/>
-            <a:r>
-              <a:rPr lang="en-US" sz="7200" b="1" i="1" dirty="0">
-                <a:effectLst>
-                  <a:outerShdw blurRad="38100" dist="38100" dir="2700000" algn="tl">
-                    <a:srgbClr val="000000">
-                      <a:alpha val="43137"/>
-                    </a:srgbClr>
-                  </a:outerShdw>
-                </a:effectLst>
-                <a:cs typeface="Arial" pitchFamily="34" charset="0"/>
-              </a:rPr>
-              <a:t>Environment Monitoring System</a:t>
-            </a:r>
-          </a:p>
-        </p:txBody>
-      </p:sp>
-      <p:sp>
-        <p:nvSpPr>
-          <p:cNvPr id="260" name="Rectangle 3"/>
-          <p:cNvSpPr/>
-          <p:nvPr/>
-        </p:nvSpPr>
-        <p:spPr>
-          <a:xfrm flipH="1">
-            <a:off x="863579" y="20245144"/>
-            <a:ext cx="28511500" cy="1138480"/>
-          </a:xfrm>
-          <a:prstGeom prst="rect">
-            <a:avLst/>
-          </a:prstGeom>
-          <a:gradFill flip="none" rotWithShape="1">
-            <a:gsLst>
-              <a:gs pos="0">
-                <a:srgbClr val="09AF25">
-                  <a:tint val="66000"/>
-                  <a:satMod val="160000"/>
-                </a:srgbClr>
-              </a:gs>
-              <a:gs pos="50000">
-                <a:srgbClr val="09AF25">
-                  <a:tint val="44500"/>
-                  <a:satMod val="160000"/>
-                </a:srgbClr>
-              </a:gs>
-              <a:gs pos="100000">
-                <a:srgbClr val="09AF25">
-                  <a:tint val="23500"/>
-                  <a:satMod val="160000"/>
-                </a:srgbClr>
-              </a:gs>
-            </a:gsLst>
-            <a:path path="circle">
-              <a:fillToRect l="50000" t="50000" r="50000" b="50000"/>
-            </a:path>
-            <a:tileRect/>
-          </a:gradFill>
-          <a:ln>
-            <a:noFill/>
-          </a:ln>
-        </p:spPr>
-        <p:style>
-          <a:lnRef idx="2">
-            <a:schemeClr val="accent1">
-              <a:shade val="50000"/>
-            </a:schemeClr>
-          </a:lnRef>
-          <a:fillRef idx="1">
-            <a:schemeClr val="accent1"/>
-          </a:fillRef>
-          <a:effectRef idx="0">
-            <a:schemeClr val="accent1"/>
-          </a:effectRef>
-          <a:fontRef idx="minor">
-            <a:schemeClr val="lt1"/>
-          </a:fontRef>
-        </p:style>
-        <p:txBody>
-          <a:bodyPr rtlCol="0" anchor="ctr"/>
-          <a:lstStyle/>
-          <a:p>
-            <a:pPr algn="ctr"/>
-            <a:endParaRPr lang="en-US" sz="3757"/>
-          </a:p>
-        </p:txBody>
-      </p:sp>
       <p:pic>
         <p:nvPicPr>
-          <p:cNvPr id="290" name="Picture 289">
-            <a:extLst>
-              <a:ext uri="{FF2B5EF4-FFF2-40B4-BE49-F238E27FC236}">
-                <a16:creationId xmlns:a16="http://schemas.microsoft.com/office/drawing/2014/main" id="{A9C0029C-D762-4F14-8177-A4FFBA2F1A1F}"/>
+          <p:cNvPr id="5" name="Picture 4">
+            <a:extLst>
+              <a:ext uri="{FF2B5EF4-FFF2-40B4-BE49-F238E27FC236}">
+                <a16:creationId xmlns:a16="http://schemas.microsoft.com/office/drawing/2014/main" id="{651D3DFD-EB02-4B7C-967D-14B9FF4097BA}"/>
               </a:ext>
             </a:extLst>
           </p:cNvPr>
@@ -4141,7 +3725,7 @@
           <p:nvPr/>
         </p:nvPicPr>
         <p:blipFill>
-          <a:blip r:embed="rId3">
+          <a:blip r:embed="rId2">
             <a:extLst>
               <a:ext uri="{28A0092B-C50C-407E-A947-70E740481C1C}">
                 <a14:useLocalDpi xmlns:a14="http://schemas.microsoft.com/office/drawing/2010/main" val="0"/>
@@ -4154,1155 +3738,18 @@
         </p:blipFill>
         <p:spPr>
           <a:xfrm>
-            <a:off x="863578" y="-253584"/>
-            <a:ext cx="8843842" cy="2879950"/>
+            <a:off x="0" y="1681"/>
+            <a:ext cx="30275213" cy="21380263"/>
           </a:xfrm>
           <a:prstGeom prst="rect">
             <a:avLst/>
           </a:prstGeom>
         </p:spPr>
       </p:pic>
-      <p:sp>
-        <p:nvSpPr>
-          <p:cNvPr id="8" name="TextBox 7">
-            <a:extLst>
-              <a:ext uri="{FF2B5EF4-FFF2-40B4-BE49-F238E27FC236}">
-                <a16:creationId xmlns:a16="http://schemas.microsoft.com/office/drawing/2014/main" id="{2749D418-4815-44CA-A468-06B27AF5969D}"/>
-              </a:ext>
-            </a:extLst>
-          </p:cNvPr>
-          <p:cNvSpPr txBox="1"/>
-          <p:nvPr/>
-        </p:nvSpPr>
-        <p:spPr>
-          <a:xfrm>
-            <a:off x="863577" y="3884081"/>
-            <a:ext cx="8330241" cy="7017306"/>
-          </a:xfrm>
-          <a:prstGeom prst="rect">
-            <a:avLst/>
-          </a:prstGeom>
-          <a:ln>
-            <a:noFill/>
-          </a:ln>
-        </p:spPr>
-        <p:style>
-          <a:lnRef idx="0">
-            <a:scrgbClr r="0" g="0" b="0"/>
-          </a:lnRef>
-          <a:fillRef idx="1001">
-            <a:schemeClr val="lt2"/>
-          </a:fillRef>
-          <a:effectRef idx="0">
-            <a:scrgbClr r="0" g="0" b="0"/>
-          </a:effectRef>
-          <a:fontRef idx="minor">
-            <a:schemeClr val="lt1"/>
-          </a:fontRef>
-        </p:style>
-        <p:txBody>
-          <a:bodyPr wrap="square" rtlCol="0">
-            <a:spAutoFit/>
-          </a:bodyPr>
-          <a:lstStyle/>
-          <a:p>
-            <a:r>
-              <a:rPr lang="en-US" sz="3600" dirty="0">
-                <a:solidFill>
-                  <a:schemeClr val="accent1">
-                    <a:lumMod val="50000"/>
-                  </a:schemeClr>
-                </a:solidFill>
-              </a:rPr>
-              <a:t>Aim of project is to monitor and regulate various environment variables, such as temperature, humidity, light, air and water. This is achieved by reading data from sensors on embedded system inside a grow area. Data is sent to a database where user can view via web browser.</a:t>
-            </a:r>
-          </a:p>
-          <a:p>
-            <a:endParaRPr lang="en-US" sz="3600" dirty="0">
-              <a:solidFill>
-                <a:schemeClr val="accent1">
-                  <a:lumMod val="50000"/>
-                </a:schemeClr>
-              </a:solidFill>
-            </a:endParaRPr>
-          </a:p>
-          <a:p>
-            <a:r>
-              <a:rPr lang="en-US" sz="3600" dirty="0">
-                <a:solidFill>
-                  <a:schemeClr val="accent1">
-                    <a:lumMod val="50000"/>
-                  </a:schemeClr>
-                </a:solidFill>
-              </a:rPr>
-              <a:t>Grow area has an automated ventilation, irrigation and artificial light system. This ensures optimum growth and allows adjusting of the environment. </a:t>
-            </a:r>
-          </a:p>
-          <a:p>
-            <a:endParaRPr lang="en-IE" dirty="0"/>
-          </a:p>
-        </p:txBody>
-      </p:sp>
-      <p:sp>
-        <p:nvSpPr>
-          <p:cNvPr id="9" name="TextBox 8">
-            <a:extLst>
-              <a:ext uri="{FF2B5EF4-FFF2-40B4-BE49-F238E27FC236}">
-                <a16:creationId xmlns:a16="http://schemas.microsoft.com/office/drawing/2014/main" id="{5BBA8546-26D7-4463-8940-FF47BE8A5E7D}"/>
-              </a:ext>
-            </a:extLst>
-          </p:cNvPr>
-          <p:cNvSpPr txBox="1"/>
-          <p:nvPr/>
-        </p:nvSpPr>
-        <p:spPr>
-          <a:xfrm>
-            <a:off x="863577" y="3220814"/>
-            <a:ext cx="8330241" cy="646331"/>
-          </a:xfrm>
-          <a:prstGeom prst="rect">
-            <a:avLst/>
-          </a:prstGeom>
-        </p:spPr>
-        <p:style>
-          <a:lnRef idx="2">
-            <a:schemeClr val="accent1">
-              <a:shade val="50000"/>
-            </a:schemeClr>
-          </a:lnRef>
-          <a:fillRef idx="1">
-            <a:schemeClr val="accent1"/>
-          </a:fillRef>
-          <a:effectRef idx="0">
-            <a:schemeClr val="accent1"/>
-          </a:effectRef>
-          <a:fontRef idx="minor">
-            <a:schemeClr val="lt1"/>
-          </a:fontRef>
-        </p:style>
-        <p:txBody>
-          <a:bodyPr wrap="square" rtlCol="0">
-            <a:spAutoFit/>
-          </a:bodyPr>
-          <a:lstStyle/>
-          <a:p>
-            <a:r>
-              <a:rPr lang="en-US" sz="3600" dirty="0"/>
-              <a:t>Summary</a:t>
-            </a:r>
-            <a:endParaRPr lang="en-IE" dirty="0"/>
-          </a:p>
-        </p:txBody>
-      </p:sp>
-      <p:sp>
-        <p:nvSpPr>
-          <p:cNvPr id="13" name="TextBox 12">
-            <a:extLst>
-              <a:ext uri="{FF2B5EF4-FFF2-40B4-BE49-F238E27FC236}">
-                <a16:creationId xmlns:a16="http://schemas.microsoft.com/office/drawing/2014/main" id="{69D4D1F6-5FB3-4154-8D3E-4EF8CCF0FB5C}"/>
-              </a:ext>
-            </a:extLst>
-          </p:cNvPr>
-          <p:cNvSpPr txBox="1"/>
-          <p:nvPr/>
-        </p:nvSpPr>
-        <p:spPr>
-          <a:xfrm>
-            <a:off x="1002368" y="11754930"/>
-            <a:ext cx="18875891" cy="646331"/>
-          </a:xfrm>
-          <a:prstGeom prst="rect">
-            <a:avLst/>
-          </a:prstGeom>
-        </p:spPr>
-        <p:style>
-          <a:lnRef idx="2">
-            <a:schemeClr val="accent1">
-              <a:shade val="50000"/>
-            </a:schemeClr>
-          </a:lnRef>
-          <a:fillRef idx="1">
-            <a:schemeClr val="accent1"/>
-          </a:fillRef>
-          <a:effectRef idx="0">
-            <a:schemeClr val="accent1"/>
-          </a:effectRef>
-          <a:fontRef idx="minor">
-            <a:schemeClr val="lt1"/>
-          </a:fontRef>
-        </p:style>
-        <p:txBody>
-          <a:bodyPr wrap="square" rtlCol="0">
-            <a:spAutoFit/>
-          </a:bodyPr>
-          <a:lstStyle/>
-          <a:p>
-            <a:r>
-              <a:rPr lang="en-US" sz="3600" dirty="0"/>
-              <a:t>Architecture Diagram</a:t>
-            </a:r>
-            <a:endParaRPr lang="en-IE" sz="3600" dirty="0"/>
-          </a:p>
-        </p:txBody>
-      </p:sp>
-      <p:sp>
-        <p:nvSpPr>
-          <p:cNvPr id="14" name="TextBox 13">
-            <a:extLst>
-              <a:ext uri="{FF2B5EF4-FFF2-40B4-BE49-F238E27FC236}">
-                <a16:creationId xmlns:a16="http://schemas.microsoft.com/office/drawing/2014/main" id="{D19D2DCE-3044-416C-A331-1347A0676324}"/>
-              </a:ext>
-            </a:extLst>
-          </p:cNvPr>
-          <p:cNvSpPr txBox="1"/>
-          <p:nvPr/>
-        </p:nvSpPr>
-        <p:spPr>
-          <a:xfrm>
-            <a:off x="21497511" y="3884081"/>
-            <a:ext cx="7876905" cy="7294305"/>
-          </a:xfrm>
-          <a:prstGeom prst="rect">
-            <a:avLst/>
-          </a:prstGeom>
-        </p:spPr>
-        <p:style>
-          <a:lnRef idx="0">
-            <a:scrgbClr r="0" g="0" b="0"/>
-          </a:lnRef>
-          <a:fillRef idx="1001">
-            <a:schemeClr val="lt2"/>
-          </a:fillRef>
-          <a:effectRef idx="0">
-            <a:scrgbClr r="0" g="0" b="0"/>
-          </a:effectRef>
-          <a:fontRef idx="major"/>
-        </p:style>
-        <p:txBody>
-          <a:bodyPr wrap="square" rtlCol="0">
-            <a:spAutoFit/>
-          </a:bodyPr>
-          <a:lstStyle/>
-          <a:p>
-            <a:pPr marL="571500" indent="-571500">
-              <a:buFont typeface="Arial" panose="020B0604020202020204" pitchFamily="34" charset="0"/>
-              <a:buChar char="•"/>
-            </a:pPr>
-            <a:r>
-              <a:rPr lang="en-US" sz="3600" dirty="0">
-                <a:solidFill>
-                  <a:schemeClr val="accent1">
-                    <a:lumMod val="50000"/>
-                  </a:schemeClr>
-                </a:solidFill>
-              </a:rPr>
-              <a:t>Successfully created web application on MERN stack and hosted on AWS servers.</a:t>
-            </a:r>
-          </a:p>
-          <a:p>
-            <a:pPr marL="571500" indent="-571500">
-              <a:buFont typeface="Arial" panose="020B0604020202020204" pitchFamily="34" charset="0"/>
-              <a:buChar char="•"/>
-            </a:pPr>
-            <a:r>
-              <a:rPr lang="en-US" sz="3600" dirty="0">
-                <a:solidFill>
-                  <a:schemeClr val="accent1">
-                    <a:lumMod val="50000"/>
-                  </a:schemeClr>
-                </a:solidFill>
-              </a:rPr>
-              <a:t>Monitored an indoor environment and based on data received changed the climate.</a:t>
-            </a:r>
-          </a:p>
-          <a:p>
-            <a:pPr marL="571500" indent="-571500">
-              <a:buFont typeface="Arial" panose="020B0604020202020204" pitchFamily="34" charset="0"/>
-              <a:buChar char="•"/>
-            </a:pPr>
-            <a:endParaRPr lang="en-US" sz="3600" dirty="0">
-              <a:solidFill>
-                <a:schemeClr val="accent1">
-                  <a:lumMod val="50000"/>
-                </a:schemeClr>
-              </a:solidFill>
-            </a:endParaRPr>
-          </a:p>
-          <a:p>
-            <a:pPr marL="571500" indent="-571500">
-              <a:buFont typeface="Arial" panose="020B0604020202020204" pitchFamily="34" charset="0"/>
-              <a:buChar char="•"/>
-            </a:pPr>
-            <a:endParaRPr lang="en-US" sz="3600" dirty="0">
-              <a:solidFill>
-                <a:schemeClr val="accent1">
-                  <a:lumMod val="50000"/>
-                </a:schemeClr>
-              </a:solidFill>
-            </a:endParaRPr>
-          </a:p>
-          <a:p>
-            <a:pPr marL="571500" indent="-571500">
-              <a:buFont typeface="Arial" panose="020B0604020202020204" pitchFamily="34" charset="0"/>
-              <a:buChar char="•"/>
-            </a:pPr>
-            <a:endParaRPr lang="en-US" sz="3600" dirty="0">
-              <a:solidFill>
-                <a:schemeClr val="accent1">
-                  <a:lumMod val="50000"/>
-                </a:schemeClr>
-              </a:solidFill>
-            </a:endParaRPr>
-          </a:p>
-          <a:p>
-            <a:pPr marL="571500" indent="-571500">
-              <a:buFont typeface="Arial" panose="020B0604020202020204" pitchFamily="34" charset="0"/>
-              <a:buChar char="•"/>
-            </a:pPr>
-            <a:endParaRPr lang="en-US" sz="3600" dirty="0">
-              <a:solidFill>
-                <a:schemeClr val="accent1">
-                  <a:lumMod val="50000"/>
-                </a:schemeClr>
-              </a:solidFill>
-            </a:endParaRPr>
-          </a:p>
-          <a:p>
-            <a:pPr marL="571500" indent="-571500">
-              <a:buFont typeface="Arial" panose="020B0604020202020204" pitchFamily="34" charset="0"/>
-              <a:buChar char="•"/>
-            </a:pPr>
-            <a:endParaRPr lang="en-US" sz="3600" dirty="0">
-              <a:solidFill>
-                <a:schemeClr val="accent1">
-                  <a:lumMod val="50000"/>
-                </a:schemeClr>
-              </a:solidFill>
-            </a:endParaRPr>
-          </a:p>
-          <a:p>
-            <a:pPr marL="571500" indent="-571500">
-              <a:buFont typeface="Arial" panose="020B0604020202020204" pitchFamily="34" charset="0"/>
-              <a:buChar char="•"/>
-            </a:pPr>
-            <a:endParaRPr lang="en-US" sz="3600" dirty="0">
-              <a:solidFill>
-                <a:schemeClr val="accent1">
-                  <a:lumMod val="50000"/>
-                </a:schemeClr>
-              </a:solidFill>
-            </a:endParaRPr>
-          </a:p>
-          <a:p>
-            <a:pPr marL="571500" indent="-571500">
-              <a:buFont typeface="Arial" panose="020B0604020202020204" pitchFamily="34" charset="0"/>
-              <a:buChar char="•"/>
-            </a:pPr>
-            <a:endParaRPr lang="en-US" sz="3600" dirty="0">
-              <a:solidFill>
-                <a:schemeClr val="accent1">
-                  <a:lumMod val="50000"/>
-                </a:schemeClr>
-              </a:solidFill>
-            </a:endParaRPr>
-          </a:p>
-        </p:txBody>
-      </p:sp>
-      <p:sp>
-        <p:nvSpPr>
-          <p:cNvPr id="15" name="TextBox 14">
-            <a:extLst>
-              <a:ext uri="{FF2B5EF4-FFF2-40B4-BE49-F238E27FC236}">
-                <a16:creationId xmlns:a16="http://schemas.microsoft.com/office/drawing/2014/main" id="{167AD5E6-5F45-42DD-B463-EDABB995AD09}"/>
-              </a:ext>
-            </a:extLst>
-          </p:cNvPr>
-          <p:cNvSpPr txBox="1"/>
-          <p:nvPr/>
-        </p:nvSpPr>
-        <p:spPr>
-          <a:xfrm>
-            <a:off x="21497511" y="3252278"/>
-            <a:ext cx="7876906" cy="648974"/>
-          </a:xfrm>
-          <a:prstGeom prst="rect">
-            <a:avLst/>
-          </a:prstGeom>
-        </p:spPr>
-        <p:style>
-          <a:lnRef idx="2">
-            <a:schemeClr val="accent1">
-              <a:shade val="50000"/>
-            </a:schemeClr>
-          </a:lnRef>
-          <a:fillRef idx="1">
-            <a:schemeClr val="accent1"/>
-          </a:fillRef>
-          <a:effectRef idx="0">
-            <a:schemeClr val="accent1"/>
-          </a:effectRef>
-          <a:fontRef idx="minor">
-            <a:schemeClr val="lt1"/>
-          </a:fontRef>
-        </p:style>
-        <p:txBody>
-          <a:bodyPr wrap="square" rtlCol="0">
-            <a:spAutoFit/>
-          </a:bodyPr>
-          <a:lstStyle/>
-          <a:p>
-            <a:r>
-              <a:rPr lang="en-US" sz="3600" dirty="0"/>
-              <a:t>Results</a:t>
-            </a:r>
-            <a:endParaRPr lang="en-IE" sz="3600" dirty="0"/>
-          </a:p>
-        </p:txBody>
-      </p:sp>
-      <p:sp>
-        <p:nvSpPr>
-          <p:cNvPr id="17" name="TextBox 16">
-            <a:extLst>
-              <a:ext uri="{FF2B5EF4-FFF2-40B4-BE49-F238E27FC236}">
-                <a16:creationId xmlns:a16="http://schemas.microsoft.com/office/drawing/2014/main" id="{F8C6868B-179D-468E-9165-05FF202CA0E8}"/>
-              </a:ext>
-            </a:extLst>
-          </p:cNvPr>
-          <p:cNvSpPr txBox="1"/>
-          <p:nvPr/>
-        </p:nvSpPr>
-        <p:spPr>
-          <a:xfrm>
-            <a:off x="10907163" y="3928074"/>
-            <a:ext cx="8877004" cy="7005846"/>
-          </a:xfrm>
-          <a:prstGeom prst="rect">
-            <a:avLst/>
-          </a:prstGeom>
-        </p:spPr>
-        <p:style>
-          <a:lnRef idx="0">
-            <a:scrgbClr r="0" g="0" b="0"/>
-          </a:lnRef>
-          <a:fillRef idx="1001">
-            <a:schemeClr val="lt2"/>
-          </a:fillRef>
-          <a:effectRef idx="0">
-            <a:scrgbClr r="0" g="0" b="0"/>
-          </a:effectRef>
-          <a:fontRef idx="major"/>
-        </p:style>
-        <p:txBody>
-          <a:bodyPr wrap="square" rtlCol="0">
-            <a:spAutoFit/>
-          </a:bodyPr>
-          <a:lstStyle/>
-          <a:p>
-            <a:endParaRPr lang="en-IE" dirty="0"/>
-          </a:p>
-        </p:txBody>
-      </p:sp>
-      <p:sp>
-        <p:nvSpPr>
-          <p:cNvPr id="18" name="TextBox 17">
-            <a:extLst>
-              <a:ext uri="{FF2B5EF4-FFF2-40B4-BE49-F238E27FC236}">
-                <a16:creationId xmlns:a16="http://schemas.microsoft.com/office/drawing/2014/main" id="{68C2FC47-FBB6-4883-A950-93FA001E07E7}"/>
-              </a:ext>
-            </a:extLst>
-          </p:cNvPr>
-          <p:cNvSpPr txBox="1"/>
-          <p:nvPr/>
-        </p:nvSpPr>
-        <p:spPr>
-          <a:xfrm>
-            <a:off x="10907163" y="3290619"/>
-            <a:ext cx="8877004" cy="646331"/>
-          </a:xfrm>
-          <a:prstGeom prst="rect">
-            <a:avLst/>
-          </a:prstGeom>
-        </p:spPr>
-        <p:style>
-          <a:lnRef idx="2">
-            <a:schemeClr val="accent1">
-              <a:shade val="50000"/>
-            </a:schemeClr>
-          </a:lnRef>
-          <a:fillRef idx="1">
-            <a:schemeClr val="accent1"/>
-          </a:fillRef>
-          <a:effectRef idx="0">
-            <a:schemeClr val="accent1"/>
-          </a:effectRef>
-          <a:fontRef idx="minor">
-            <a:schemeClr val="lt1"/>
-          </a:fontRef>
-        </p:style>
-        <p:txBody>
-          <a:bodyPr wrap="square" rtlCol="0">
-            <a:spAutoFit/>
-          </a:bodyPr>
-          <a:lstStyle/>
-          <a:p>
-            <a:r>
-              <a:rPr lang="en-US" sz="3600" dirty="0"/>
-              <a:t>Technologies Used</a:t>
-            </a:r>
-            <a:endParaRPr lang="en-IE" sz="3600" dirty="0"/>
-          </a:p>
-        </p:txBody>
-      </p:sp>
-      <p:pic>
-        <p:nvPicPr>
-          <p:cNvPr id="20" name="Picture 19">
-            <a:extLst>
-              <a:ext uri="{FF2B5EF4-FFF2-40B4-BE49-F238E27FC236}">
-                <a16:creationId xmlns:a16="http://schemas.microsoft.com/office/drawing/2014/main" id="{A3B1ADFF-AE75-478B-A767-F9B1A97114F5}"/>
-              </a:ext>
-            </a:extLst>
-          </p:cNvPr>
-          <p:cNvPicPr>
-            <a:picLocks noChangeAspect="1"/>
-          </p:cNvPicPr>
-          <p:nvPr/>
-        </p:nvPicPr>
-        <p:blipFill>
-          <a:blip r:embed="rId4">
-            <a:extLst>
-              <a:ext uri="{28A0092B-C50C-407E-A947-70E740481C1C}">
-                <a14:useLocalDpi xmlns:a14="http://schemas.microsoft.com/office/drawing/2010/main" val="0"/>
-              </a:ext>
-            </a:extLst>
-          </a:blip>
-          <a:stretch>
-            <a:fillRect/>
-          </a:stretch>
-        </p:blipFill>
-        <p:spPr>
-          <a:xfrm>
-            <a:off x="11513010" y="5029147"/>
-            <a:ext cx="3508565" cy="2239510"/>
-          </a:xfrm>
-          <a:prstGeom prst="rect">
-            <a:avLst/>
-          </a:prstGeom>
-        </p:spPr>
-      </p:pic>
-      <p:pic>
-        <p:nvPicPr>
-          <p:cNvPr id="43" name="Picture 42">
-            <a:extLst>
-              <a:ext uri="{FF2B5EF4-FFF2-40B4-BE49-F238E27FC236}">
-                <a16:creationId xmlns:a16="http://schemas.microsoft.com/office/drawing/2014/main" id="{76C10FAB-C078-4739-A905-B356345105CE}"/>
-              </a:ext>
-            </a:extLst>
-          </p:cNvPr>
-          <p:cNvPicPr>
-            <a:picLocks noChangeAspect="1"/>
-          </p:cNvPicPr>
-          <p:nvPr/>
-        </p:nvPicPr>
-        <p:blipFill>
-          <a:blip r:embed="rId5" cstate="print">
-            <a:extLst>
-              <a:ext uri="{28A0092B-C50C-407E-A947-70E740481C1C}">
-                <a14:useLocalDpi xmlns:a14="http://schemas.microsoft.com/office/drawing/2010/main" val="0"/>
-              </a:ext>
-            </a:extLst>
-          </a:blip>
-          <a:stretch>
-            <a:fillRect/>
-          </a:stretch>
-        </p:blipFill>
-        <p:spPr>
-          <a:xfrm>
-            <a:off x="11513010" y="4212935"/>
-            <a:ext cx="3350733" cy="1577201"/>
-          </a:xfrm>
-          <a:prstGeom prst="rect">
-            <a:avLst/>
-          </a:prstGeom>
-        </p:spPr>
-      </p:pic>
-      <p:pic>
-        <p:nvPicPr>
-          <p:cNvPr id="45" name="Picture 44">
-            <a:extLst>
-              <a:ext uri="{FF2B5EF4-FFF2-40B4-BE49-F238E27FC236}">
-                <a16:creationId xmlns:a16="http://schemas.microsoft.com/office/drawing/2014/main" id="{9A76B49C-691B-4A0E-AD7A-932259236C5C}"/>
-              </a:ext>
-            </a:extLst>
-          </p:cNvPr>
-          <p:cNvPicPr>
-            <a:picLocks noChangeAspect="1"/>
-          </p:cNvPicPr>
-          <p:nvPr/>
-        </p:nvPicPr>
-        <p:blipFill>
-          <a:blip r:embed="rId6" cstate="print">
-            <a:extLst>
-              <a:ext uri="{28A0092B-C50C-407E-A947-70E740481C1C}">
-                <a14:useLocalDpi xmlns:a14="http://schemas.microsoft.com/office/drawing/2010/main" val="0"/>
-              </a:ext>
-            </a:extLst>
-          </a:blip>
-          <a:stretch>
-            <a:fillRect/>
-          </a:stretch>
-        </p:blipFill>
-        <p:spPr>
-          <a:xfrm>
-            <a:off x="15915035" y="4266406"/>
-            <a:ext cx="2918789" cy="1785326"/>
-          </a:xfrm>
-          <a:prstGeom prst="rect">
-            <a:avLst/>
-          </a:prstGeom>
-        </p:spPr>
-      </p:pic>
-      <p:pic>
-        <p:nvPicPr>
-          <p:cNvPr id="47" name="Picture 46">
-            <a:extLst>
-              <a:ext uri="{FF2B5EF4-FFF2-40B4-BE49-F238E27FC236}">
-                <a16:creationId xmlns:a16="http://schemas.microsoft.com/office/drawing/2014/main" id="{B81C765B-2BF7-46A5-965D-A280123A685B}"/>
-              </a:ext>
-            </a:extLst>
-          </p:cNvPr>
-          <p:cNvPicPr>
-            <a:picLocks noChangeAspect="1"/>
-          </p:cNvPicPr>
-          <p:nvPr/>
-        </p:nvPicPr>
-        <p:blipFill>
-          <a:blip r:embed="rId7" cstate="print">
-            <a:extLst>
-              <a:ext uri="{28A0092B-C50C-407E-A947-70E740481C1C}">
-                <a14:useLocalDpi xmlns:a14="http://schemas.microsoft.com/office/drawing/2010/main" val="0"/>
-              </a:ext>
-            </a:extLst>
-          </a:blip>
-          <a:stretch>
-            <a:fillRect/>
-          </a:stretch>
-        </p:blipFill>
-        <p:spPr>
-          <a:xfrm>
-            <a:off x="15627422" y="5346666"/>
-            <a:ext cx="2981726" cy="1823606"/>
-          </a:xfrm>
-          <a:prstGeom prst="rect">
-            <a:avLst/>
-          </a:prstGeom>
-        </p:spPr>
-      </p:pic>
-      <p:pic>
-        <p:nvPicPr>
-          <p:cNvPr id="53" name="Picture 52">
-            <a:extLst>
-              <a:ext uri="{FF2B5EF4-FFF2-40B4-BE49-F238E27FC236}">
-                <a16:creationId xmlns:a16="http://schemas.microsoft.com/office/drawing/2014/main" id="{5D574D27-54AD-40CF-80C3-EF5DA91D6F66}"/>
-              </a:ext>
-            </a:extLst>
-          </p:cNvPr>
-          <p:cNvPicPr>
-            <a:picLocks noChangeAspect="1"/>
-          </p:cNvPicPr>
-          <p:nvPr/>
-        </p:nvPicPr>
-        <p:blipFill>
-          <a:blip r:embed="rId8" cstate="print">
-            <a:extLst>
-              <a:ext uri="{28A0092B-C50C-407E-A947-70E740481C1C}">
-                <a14:useLocalDpi xmlns:a14="http://schemas.microsoft.com/office/drawing/2010/main" val="0"/>
-              </a:ext>
-            </a:extLst>
-          </a:blip>
-          <a:stretch>
-            <a:fillRect/>
-          </a:stretch>
-        </p:blipFill>
-        <p:spPr>
-          <a:xfrm>
-            <a:off x="11730488" y="7008019"/>
-            <a:ext cx="2952440" cy="1826811"/>
-          </a:xfrm>
-          <a:prstGeom prst="rect">
-            <a:avLst/>
-          </a:prstGeom>
-        </p:spPr>
-      </p:pic>
-      <p:pic>
-        <p:nvPicPr>
-          <p:cNvPr id="55" name="Picture 54">
-            <a:extLst>
-              <a:ext uri="{FF2B5EF4-FFF2-40B4-BE49-F238E27FC236}">
-                <a16:creationId xmlns:a16="http://schemas.microsoft.com/office/drawing/2014/main" id="{1BA4B1B2-6E10-4C9F-BFB1-A5E203887529}"/>
-              </a:ext>
-            </a:extLst>
-          </p:cNvPr>
-          <p:cNvPicPr>
-            <a:picLocks noChangeAspect="1"/>
-          </p:cNvPicPr>
-          <p:nvPr/>
-        </p:nvPicPr>
-        <p:blipFill>
-          <a:blip r:embed="rId9">
-            <a:extLst>
-              <a:ext uri="{28A0092B-C50C-407E-A947-70E740481C1C}">
-                <a14:useLocalDpi xmlns:a14="http://schemas.microsoft.com/office/drawing/2010/main" val="0"/>
-              </a:ext>
-            </a:extLst>
-          </a:blip>
-          <a:stretch>
-            <a:fillRect/>
-          </a:stretch>
-        </p:blipFill>
-        <p:spPr>
-          <a:xfrm>
-            <a:off x="15715503" y="9065556"/>
-            <a:ext cx="2893645" cy="1396184"/>
-          </a:xfrm>
-          <a:prstGeom prst="rect">
-            <a:avLst/>
-          </a:prstGeom>
-        </p:spPr>
-      </p:pic>
-      <p:sp>
-        <p:nvSpPr>
-          <p:cNvPr id="56" name="TextBox 55">
-            <a:extLst>
-              <a:ext uri="{FF2B5EF4-FFF2-40B4-BE49-F238E27FC236}">
-                <a16:creationId xmlns:a16="http://schemas.microsoft.com/office/drawing/2014/main" id="{66027E96-223B-4139-85B0-BDB1092DBDBF}"/>
-              </a:ext>
-            </a:extLst>
-          </p:cNvPr>
-          <p:cNvSpPr txBox="1"/>
-          <p:nvPr/>
-        </p:nvSpPr>
-        <p:spPr>
-          <a:xfrm>
-            <a:off x="21428103" y="16965363"/>
-            <a:ext cx="7844742" cy="2123658"/>
-          </a:xfrm>
-          <a:prstGeom prst="rect">
-            <a:avLst/>
-          </a:prstGeom>
-        </p:spPr>
-        <p:style>
-          <a:lnRef idx="0">
-            <a:scrgbClr r="0" g="0" b="0"/>
-          </a:lnRef>
-          <a:fillRef idx="1001">
-            <a:schemeClr val="lt2"/>
-          </a:fillRef>
-          <a:effectRef idx="0">
-            <a:scrgbClr r="0" g="0" b="0"/>
-          </a:effectRef>
-          <a:fontRef idx="major"/>
-        </p:style>
-        <p:txBody>
-          <a:bodyPr wrap="square" rtlCol="0">
-            <a:spAutoFit/>
-          </a:bodyPr>
-          <a:lstStyle/>
-          <a:p>
-            <a:r>
-              <a:rPr lang="en-US" sz="3200" dirty="0"/>
-              <a:t>For more information visit:</a:t>
-            </a:r>
-          </a:p>
-          <a:p>
-            <a:endParaRPr lang="en-IE" sz="3200" dirty="0">
-              <a:hlinkClick r:id="rId10"/>
-            </a:endParaRPr>
-          </a:p>
-          <a:p>
-            <a:r>
-              <a:rPr lang="en-IE" sz="3200" dirty="0">
-                <a:hlinkClick r:id="rId10"/>
-              </a:rPr>
-              <a:t>https://github.com/AonghusOD/</a:t>
-            </a:r>
-            <a:r>
-              <a:rPr lang="en-IE" sz="3200" dirty="0"/>
-              <a:t>ProjectCode</a:t>
-            </a:r>
-          </a:p>
-          <a:p>
-            <a:endParaRPr lang="en-IE" sz="3600" dirty="0"/>
-          </a:p>
-        </p:txBody>
-      </p:sp>
-      <p:sp>
-        <p:nvSpPr>
-          <p:cNvPr id="57" name="TextBox 56">
-            <a:extLst>
-              <a:ext uri="{FF2B5EF4-FFF2-40B4-BE49-F238E27FC236}">
-                <a16:creationId xmlns:a16="http://schemas.microsoft.com/office/drawing/2014/main" id="{0536EEF2-3CAB-49C3-8466-65460BAF65D4}"/>
-              </a:ext>
-            </a:extLst>
-          </p:cNvPr>
-          <p:cNvSpPr txBox="1"/>
-          <p:nvPr/>
-        </p:nvSpPr>
-        <p:spPr>
-          <a:xfrm>
-            <a:off x="21428103" y="16319032"/>
-            <a:ext cx="7844741" cy="646331"/>
-          </a:xfrm>
-          <a:prstGeom prst="rect">
-            <a:avLst/>
-          </a:prstGeom>
-        </p:spPr>
-        <p:style>
-          <a:lnRef idx="2">
-            <a:schemeClr val="accent1">
-              <a:shade val="50000"/>
-            </a:schemeClr>
-          </a:lnRef>
-          <a:fillRef idx="1">
-            <a:schemeClr val="accent1"/>
-          </a:fillRef>
-          <a:effectRef idx="0">
-            <a:schemeClr val="accent1"/>
-          </a:effectRef>
-          <a:fontRef idx="minor">
-            <a:schemeClr val="lt1"/>
-          </a:fontRef>
-        </p:style>
-        <p:txBody>
-          <a:bodyPr wrap="square" rtlCol="0">
-            <a:spAutoFit/>
-          </a:bodyPr>
-          <a:lstStyle/>
-          <a:p>
-            <a:r>
-              <a:rPr lang="en-US" sz="3600" dirty="0" err="1"/>
-              <a:t>Github</a:t>
-            </a:r>
-            <a:r>
-              <a:rPr lang="en-US" sz="3600" dirty="0"/>
-              <a:t> Repository</a:t>
-            </a:r>
-            <a:endParaRPr lang="en-IE" sz="3600" dirty="0"/>
-          </a:p>
-        </p:txBody>
-      </p:sp>
-      <p:sp>
-        <p:nvSpPr>
-          <p:cNvPr id="58" name="TextBox 57">
-            <a:extLst>
-              <a:ext uri="{FF2B5EF4-FFF2-40B4-BE49-F238E27FC236}">
-                <a16:creationId xmlns:a16="http://schemas.microsoft.com/office/drawing/2014/main" id="{85D0D6EF-C1F0-4A4A-887B-91B74EDEE4BD}"/>
-              </a:ext>
-            </a:extLst>
-          </p:cNvPr>
-          <p:cNvSpPr txBox="1"/>
-          <p:nvPr/>
-        </p:nvSpPr>
-        <p:spPr>
-          <a:xfrm>
-            <a:off x="11513010" y="1701309"/>
-            <a:ext cx="7494060" cy="646331"/>
-          </a:xfrm>
-          <a:prstGeom prst="rect">
-            <a:avLst/>
-          </a:prstGeom>
-          <a:noFill/>
-        </p:spPr>
-        <p:txBody>
-          <a:bodyPr wrap="square" rtlCol="0">
-            <a:spAutoFit/>
-          </a:bodyPr>
-          <a:lstStyle/>
-          <a:p>
-            <a:r>
-              <a:rPr lang="en-US" sz="3600" dirty="0"/>
-              <a:t>AONGHUS O DOMHNAILL</a:t>
-            </a:r>
-            <a:endParaRPr lang="en-IE" sz="3600" dirty="0"/>
-          </a:p>
-        </p:txBody>
-      </p:sp>
-      <p:pic>
-        <p:nvPicPr>
-          <p:cNvPr id="60" name="Picture 59">
-            <a:extLst>
-              <a:ext uri="{FF2B5EF4-FFF2-40B4-BE49-F238E27FC236}">
-                <a16:creationId xmlns:a16="http://schemas.microsoft.com/office/drawing/2014/main" id="{5FACE1CB-EE79-4709-81EE-621DB8B41136}"/>
-              </a:ext>
-            </a:extLst>
-          </p:cNvPr>
-          <p:cNvPicPr>
-            <a:picLocks noChangeAspect="1"/>
-          </p:cNvPicPr>
-          <p:nvPr/>
-        </p:nvPicPr>
-        <p:blipFill>
-          <a:blip r:embed="rId11" cstate="print">
-            <a:extLst>
-              <a:ext uri="{28A0092B-C50C-407E-A947-70E740481C1C}">
-                <a14:useLocalDpi xmlns:a14="http://schemas.microsoft.com/office/drawing/2010/main" val="0"/>
-              </a:ext>
-            </a:extLst>
-          </a:blip>
-          <a:stretch>
-            <a:fillRect/>
-          </a:stretch>
-        </p:blipFill>
-        <p:spPr>
-          <a:xfrm>
-            <a:off x="16055907" y="6987813"/>
-            <a:ext cx="2024870" cy="1379442"/>
-          </a:xfrm>
-          <a:prstGeom prst="rect">
-            <a:avLst/>
-          </a:prstGeom>
-        </p:spPr>
-      </p:pic>
-      <p:sp>
-        <p:nvSpPr>
-          <p:cNvPr id="61" name="TextBox 60">
-            <a:extLst>
-              <a:ext uri="{FF2B5EF4-FFF2-40B4-BE49-F238E27FC236}">
-                <a16:creationId xmlns:a16="http://schemas.microsoft.com/office/drawing/2014/main" id="{D2B0B810-FFE5-4973-BB34-BED8B60E01D4}"/>
-              </a:ext>
-            </a:extLst>
-          </p:cNvPr>
-          <p:cNvSpPr txBox="1"/>
-          <p:nvPr/>
-        </p:nvSpPr>
-        <p:spPr>
-          <a:xfrm>
-            <a:off x="1002369" y="12383992"/>
-            <a:ext cx="18875892" cy="7104840"/>
-          </a:xfrm>
-          <a:prstGeom prst="rect">
-            <a:avLst/>
-          </a:prstGeom>
-        </p:spPr>
-        <p:style>
-          <a:lnRef idx="0">
-            <a:scrgbClr r="0" g="0" b="0"/>
-          </a:lnRef>
-          <a:fillRef idx="1001">
-            <a:schemeClr val="lt2"/>
-          </a:fillRef>
-          <a:effectRef idx="0">
-            <a:scrgbClr r="0" g="0" b="0"/>
-          </a:effectRef>
-          <a:fontRef idx="major"/>
-        </p:style>
-        <p:txBody>
-          <a:bodyPr wrap="square" rtlCol="0">
-            <a:spAutoFit/>
-          </a:bodyPr>
-          <a:lstStyle/>
-          <a:p>
-            <a:endParaRPr lang="en-IE" dirty="0"/>
-          </a:p>
-        </p:txBody>
-      </p:sp>
-      <p:pic>
-        <p:nvPicPr>
-          <p:cNvPr id="1033" name="Picture 1032">
-            <a:extLst>
-              <a:ext uri="{FF2B5EF4-FFF2-40B4-BE49-F238E27FC236}">
-                <a16:creationId xmlns:a16="http://schemas.microsoft.com/office/drawing/2014/main" id="{962352F9-05BC-4617-9FFA-EBE3584E7100}"/>
-              </a:ext>
-            </a:extLst>
-          </p:cNvPr>
-          <p:cNvPicPr>
-            <a:picLocks noChangeAspect="1"/>
-          </p:cNvPicPr>
-          <p:nvPr/>
-        </p:nvPicPr>
-        <p:blipFill>
-          <a:blip r:embed="rId12">
-            <a:extLst>
-              <a:ext uri="{28A0092B-C50C-407E-A947-70E740481C1C}">
-                <a14:useLocalDpi xmlns:a14="http://schemas.microsoft.com/office/drawing/2010/main" val="0"/>
-              </a:ext>
-            </a:extLst>
-          </a:blip>
-          <a:stretch>
-            <a:fillRect/>
-          </a:stretch>
-        </p:blipFill>
-        <p:spPr>
-          <a:xfrm>
-            <a:off x="707997" y="12127943"/>
-            <a:ext cx="19278933" cy="7636875"/>
-          </a:xfrm>
-          <a:prstGeom prst="rect">
-            <a:avLst/>
-          </a:prstGeom>
-        </p:spPr>
-      </p:pic>
-      <p:pic>
-        <p:nvPicPr>
-          <p:cNvPr id="7" name="Picture 6">
-            <a:extLst>
-              <a:ext uri="{FF2B5EF4-FFF2-40B4-BE49-F238E27FC236}">
-                <a16:creationId xmlns:a16="http://schemas.microsoft.com/office/drawing/2014/main" id="{BACCB2A1-73A9-4A30-84D5-719FAF5B571C}"/>
-              </a:ext>
-            </a:extLst>
-          </p:cNvPr>
-          <p:cNvPicPr>
-            <a:picLocks noChangeAspect="1"/>
-          </p:cNvPicPr>
-          <p:nvPr/>
-        </p:nvPicPr>
-        <p:blipFill>
-          <a:blip r:embed="rId13">
-            <a:extLst>
-              <a:ext uri="{28A0092B-C50C-407E-A947-70E740481C1C}">
-                <a14:useLocalDpi xmlns:a14="http://schemas.microsoft.com/office/drawing/2010/main" val="0"/>
-              </a:ext>
-            </a:extLst>
-          </a:blip>
-          <a:stretch>
-            <a:fillRect/>
-          </a:stretch>
-        </p:blipFill>
-        <p:spPr>
-          <a:xfrm>
-            <a:off x="22059002" y="7523182"/>
-            <a:ext cx="6799683" cy="3410738"/>
-          </a:xfrm>
-          <a:prstGeom prst="rect">
-            <a:avLst/>
-          </a:prstGeom>
-        </p:spPr>
-      </p:pic>
-      <p:sp>
-        <p:nvSpPr>
-          <p:cNvPr id="31" name="TextBox 30">
-            <a:extLst>
-              <a:ext uri="{FF2B5EF4-FFF2-40B4-BE49-F238E27FC236}">
-                <a16:creationId xmlns:a16="http://schemas.microsoft.com/office/drawing/2014/main" id="{471DB62D-441F-4ECB-B867-23AA9426E6AF}"/>
-              </a:ext>
-            </a:extLst>
-          </p:cNvPr>
-          <p:cNvSpPr txBox="1"/>
-          <p:nvPr/>
-        </p:nvSpPr>
-        <p:spPr>
-          <a:xfrm>
-            <a:off x="21520393" y="11814177"/>
-            <a:ext cx="7876906" cy="648974"/>
-          </a:xfrm>
-          <a:prstGeom prst="rect">
-            <a:avLst/>
-          </a:prstGeom>
-        </p:spPr>
-        <p:style>
-          <a:lnRef idx="2">
-            <a:schemeClr val="accent1">
-              <a:shade val="50000"/>
-            </a:schemeClr>
-          </a:lnRef>
-          <a:fillRef idx="1">
-            <a:schemeClr val="accent1"/>
-          </a:fillRef>
-          <a:effectRef idx="0">
-            <a:schemeClr val="accent1"/>
-          </a:effectRef>
-          <a:fontRef idx="minor">
-            <a:schemeClr val="lt1"/>
-          </a:fontRef>
-        </p:style>
-        <p:txBody>
-          <a:bodyPr wrap="square" rtlCol="0">
-            <a:spAutoFit/>
-          </a:bodyPr>
-          <a:lstStyle/>
-          <a:p>
-            <a:r>
-              <a:rPr lang="en-US" sz="3600" dirty="0"/>
-              <a:t>Conclusion</a:t>
-            </a:r>
-            <a:endParaRPr lang="en-IE" sz="3600" dirty="0"/>
-          </a:p>
-        </p:txBody>
-      </p:sp>
-      <p:sp>
-        <p:nvSpPr>
-          <p:cNvPr id="32" name="TextBox 31">
-            <a:extLst>
-              <a:ext uri="{FF2B5EF4-FFF2-40B4-BE49-F238E27FC236}">
-                <a16:creationId xmlns:a16="http://schemas.microsoft.com/office/drawing/2014/main" id="{F1978034-C64D-4D12-B9EB-10FD9841958C}"/>
-              </a:ext>
-            </a:extLst>
-          </p:cNvPr>
-          <p:cNvSpPr txBox="1"/>
-          <p:nvPr/>
-        </p:nvSpPr>
-        <p:spPr>
-          <a:xfrm>
-            <a:off x="21520393" y="12463151"/>
-            <a:ext cx="7876905" cy="2862322"/>
-          </a:xfrm>
-          <a:prstGeom prst="rect">
-            <a:avLst/>
-          </a:prstGeom>
-        </p:spPr>
-        <p:style>
-          <a:lnRef idx="0">
-            <a:scrgbClr r="0" g="0" b="0"/>
-          </a:lnRef>
-          <a:fillRef idx="1001">
-            <a:schemeClr val="lt2"/>
-          </a:fillRef>
-          <a:effectRef idx="0">
-            <a:scrgbClr r="0" g="0" b="0"/>
-          </a:effectRef>
-          <a:fontRef idx="major"/>
-        </p:style>
-        <p:txBody>
-          <a:bodyPr wrap="square" rtlCol="0">
-            <a:spAutoFit/>
-          </a:bodyPr>
-          <a:lstStyle/>
-          <a:p>
-            <a:pPr marL="571500" indent="-571500">
-              <a:buFont typeface="Arial" panose="020B0604020202020204" pitchFamily="34" charset="0"/>
-              <a:buChar char="•"/>
-            </a:pPr>
-            <a:r>
-              <a:rPr lang="en-GB" sz="3600" dirty="0">
-                <a:solidFill>
-                  <a:schemeClr val="accent1">
-                    <a:lumMod val="50000"/>
-                  </a:schemeClr>
-                </a:solidFill>
-                <a:effectLst/>
-                <a:latin typeface="Calibri" panose="020F0502020204030204" pitchFamily="34" charset="0"/>
-                <a:ea typeface="Calibri" panose="020F0502020204030204" pitchFamily="34" charset="0"/>
-                <a:cs typeface="Times New Roman" panose="02020603050405020304" pitchFamily="18" charset="0"/>
-              </a:rPr>
-              <a:t>In this project you can see the integration of a web server, microcontroller, sensors, and a database server that can be easily adapted into many systems. </a:t>
-            </a:r>
-            <a:endParaRPr lang="en-IE" sz="3600" dirty="0">
-              <a:solidFill>
-                <a:schemeClr val="accent1">
-                  <a:lumMod val="50000"/>
-                </a:schemeClr>
-              </a:solidFill>
-              <a:effectLst/>
-              <a:latin typeface="Calibri" panose="020F0502020204030204" pitchFamily="34" charset="0"/>
-              <a:ea typeface="Calibri" panose="020F0502020204030204" pitchFamily="34" charset="0"/>
-              <a:cs typeface="Times New Roman" panose="02020603050405020304" pitchFamily="18" charset="0"/>
-            </a:endParaRPr>
-          </a:p>
-        </p:txBody>
-      </p:sp>
     </p:spTree>
     <p:extLst>
       <p:ext uri="{BB962C8B-B14F-4D97-AF65-F5344CB8AC3E}">
-        <p14:creationId xmlns:p14="http://schemas.microsoft.com/office/powerpoint/2010/main" val="1743097050"/>
+        <p14:creationId xmlns:p14="http://schemas.microsoft.com/office/powerpoint/2010/main" val="3645383058"/>
       </p:ext>
     </p:extLst>
   </p:cSld>
